--- a/dist/초3/수학/자연수계산/초3_수학_자연수계산_10_0이있는수의뺄셈.pptx
+++ b/dist/초3/수학/자연수계산/초3_수학_자연수계산_10_0이있는수의뺄셈.pptx
@@ -120,13 +120,13 @@
   <p:extLst>
     <p:ext uri="{521415D9-36F7-43E2-AB2F-B90AF26B5E84}">
       <p14:sectionLst xmlns:p14="http://schemas.microsoft.com/office/powerpoint/2010/main">
-        <p14:section name="도입" id="{6dabab3e-96eb-cb3b-55a8-594a3ecca74b}">
+        <p14:section name="도입" id="{447205d7-a3eb-ca16-7981-b5c682f039dd}">
           <p14:sldIdLst>
             <p14:sldId id="256"/>
             <p14:sldId id="257"/>
           </p14:sldIdLst>
         </p14:section>
-        <p14:section name="개념" id="{860c1e39-848e-4a10-9879-0a50b9314b78}">
+        <p14:section name="개념" id="{f8388985-f8eb-dbc7-01eb-0dbfa4781744}">
           <p14:sldIdLst>
             <p14:sldId id="258"/>
             <p14:sldId id="259"/>
@@ -134,32 +134,32 @@
             <p14:sldId id="262"/>
           </p14:sldIdLst>
         </p14:section>
-        <p14:section name="연습" id="{5337e2cc-6c74-e290-ee6a-1d7451020de7}">
+        <p14:section name="연습" id="{a3cc8be4-6516-546e-89a3-88d7b9fdc7cf}">
           <p14:sldIdLst>
             <p14:sldId id="261"/>
             <p14:sldId id="263"/>
             <p14:sldId id="264"/>
           </p14:sldIdLst>
         </p14:section>
-        <p14:section name="개념" id="{d2f906f8-8fe0-6bcc-da13-a6af39303665}">
+        <p14:section name="개념" id="{d1dbb54c-5833-cb44-9012-9304a66155f9}">
           <p14:sldIdLst/>
         </p14:section>
-        <p14:section name="연습" id="{f53a66fe-57de-c599-5212-49a9c0a6ff86}">
+        <p14:section name="연습" id="{a0153982-7a2d-0385-b9d9-ebd3d3dd174b}">
           <p14:sldIdLst/>
         </p14:section>
-        <p14:section name="확인" id="{abff57af-a202-2839-9792-25bb07a5c908}">
+        <p14:section name="확인" id="{ec128907-3442-61c3-c3ab-67d910497e54}">
           <p14:sldIdLst>
             <p14:sldId id="265"/>
             <p14:sldId id="266"/>
             <p14:sldId id="267"/>
           </p14:sldIdLst>
         </p14:section>
-        <p14:section name="정리" id="{15db5c1b-522d-55b9-d179-d2a2a49f12b5}">
+        <p14:section name="정리" id="{3930e235-9856-c68f-9c3d-73908bc4b3de}">
           <p14:sldIdLst>
             <p14:sldId id="268"/>
           </p14:sldIdLst>
         </p14:section>
-        <p14:section name="보충" id="{21e71997-86b2-e7c1-1b99-46a21d1ab56d}">
+        <p14:section name="보충" id="{cef21049-8bb0-9f94-fb6c-387c4ac1e0d2}">
           <p14:sldIdLst>
             <p14:sldId id="269"/>
           </p14:sldIdLst>
@@ -1686,7 +1686,8 @@
 막히면
 - 종이에 403을 247과 156으로 가르는 가르기 그림을 그립니다. 처음 수가 전체, 답과 빼는 수가 부분입니다.
 주의
-- 덧셈 결과와 처음 수를 자리마다 비교하면 틀린 자리를 찾기 쉽습니다. 오늘 가장 흔한 실수는 십의 자리를 9가 아니라 10에서 빼는 것이고, 이때 덧셈 결과의 십의 자리가 1 커집니다(S08).</a:t>
+- 덧셈 결과와 처음 수를 자리마다 비교하면 틀린 자리를 찾기 쉽습니다. 오늘 가장 흔한 실수는 십의 자리를 9가 아니라 10에서 빼는 것이고, 이때 덧셈 결과의 십의 자리가 1 커집니다(S08).
+- 자리마다 큰 수에서 작은 수를 뺀 353도 353 + 156 = 509라서 덧셈으로 걸러집니다(M5).</a:t>
             </a:r>
             <a:endParaRPr lang="en-US" dirty="0"/>
           </a:p>

--- a/dist/초3/수학/자연수계산/초3_수학_자연수계산_10_0이있는수의뺄셈.pptx
+++ b/dist/초3/수학/자연수계산/초3_수학_자연수계산_10_0이있는수의뺄셈.pptx
@@ -120,13 +120,13 @@
   <p:extLst>
     <p:ext uri="{521415D9-36F7-43E2-AB2F-B90AF26B5E84}">
       <p14:sectionLst xmlns:p14="http://schemas.microsoft.com/office/powerpoint/2010/main">
-        <p14:section name="도입" id="{447205d7-a3eb-ca16-7981-b5c682f039dd}">
+        <p14:section name="도입" id="{64de5a17-7cbc-2136-7399-2091de253090}">
           <p14:sldIdLst>
             <p14:sldId id="256"/>
             <p14:sldId id="257"/>
           </p14:sldIdLst>
         </p14:section>
-        <p14:section name="개념" id="{f8388985-f8eb-dbc7-01eb-0dbfa4781744}">
+        <p14:section name="개념" id="{de8518f6-7c92-56d5-6581-5f1cad8eab0e}">
           <p14:sldIdLst>
             <p14:sldId id="258"/>
             <p14:sldId id="259"/>
@@ -134,32 +134,32 @@
             <p14:sldId id="262"/>
           </p14:sldIdLst>
         </p14:section>
-        <p14:section name="연습" id="{a3cc8be4-6516-546e-89a3-88d7b9fdc7cf}">
+        <p14:section name="연습" id="{be4d2f9f-afa6-f0f1-a4b7-1caedd02bf1e}">
           <p14:sldIdLst>
             <p14:sldId id="261"/>
             <p14:sldId id="263"/>
             <p14:sldId id="264"/>
           </p14:sldIdLst>
         </p14:section>
-        <p14:section name="개념" id="{d1dbb54c-5833-cb44-9012-9304a66155f9}">
+        <p14:section name="개념" id="{5cd34168-acf4-3acb-e203-3346000e7821}">
           <p14:sldIdLst/>
         </p14:section>
-        <p14:section name="연습" id="{a0153982-7a2d-0385-b9d9-ebd3d3dd174b}">
+        <p14:section name="연습" id="{dad874ab-6788-ba46-6360-f56e98e85607}">
           <p14:sldIdLst/>
         </p14:section>
-        <p14:section name="확인" id="{ec128907-3442-61c3-c3ab-67d910497e54}">
+        <p14:section name="확인" id="{357c96e1-f26b-f90e-94c4-adf96a98c7b8}">
           <p14:sldIdLst>
             <p14:sldId id="265"/>
             <p14:sldId id="266"/>
             <p14:sldId id="267"/>
           </p14:sldIdLst>
         </p14:section>
-        <p14:section name="정리" id="{3930e235-9856-c68f-9c3d-73908bc4b3de}">
+        <p14:section name="정리" id="{1ad70585-66de-d6f1-3cfb-dc072bfa52f6}">
           <p14:sldIdLst>
             <p14:sldId id="268"/>
           </p14:sldIdLst>
         </p14:section>
-        <p14:section name="보충" id="{cef21049-8bb0-9f94-fb6c-387c4ac1e0d2}">
+        <p14:section name="보충" id="{acde72e2-b064-abb5-a181-879b4d86125c}">
           <p14:sldIdLst>
             <p14:sldId id="269"/>
           </p14:sldIdLst>
